--- a/docs/Financial_Risk_Signal_Aggregator_Deck.pptx
+++ b/docs/Financial_Risk_Signal_Aggregator_Deck.pptx
@@ -8205,7 +8205,7 @@
                 </a:solidFill>
                 <a:latin typeface="Segoe UI"/>
               </a:rPr>
-              <a:t>Live demo:  [Streamlit Community Cloud URL — add after deploy]</a:t>
+              <a:t>Live demo:  financial-risk-signal-aggregator-production.up.railway.app</a:t>
             </a:r>
           </a:p>
         </p:txBody>

--- a/docs/Financial_Risk_Signal_Aggregator_Deck.pptx
+++ b/docs/Financial_Risk_Signal_Aggregator_Deck.pptx
@@ -4004,7 +4004,7 @@
                 </a:solidFill>
                 <a:latin typeface="Segoe UI"/>
               </a:rPr>
-              <a:t>5 personas</a:t>
+              <a:t>67 customers</a:t>
             </a:r>
           </a:p>
         </p:txBody>
@@ -4043,7 +4043,7 @@
                 </a:solidFill>
                 <a:latin typeface="Segoe UI"/>
               </a:rPr>
-              <a:t>incl. a clean control case to prove precision</a:t>
+              <a:t>1,971 transactions — only 11 flagged, 56 clean</a:t>
             </a:r>
           </a:p>
         </p:txBody>
@@ -7582,7 +7582,7 @@
                 </a:solidFill>
                 <a:latin typeface="Segoe UI"/>
               </a:rPr>
-              <a:t>A model that flags everyone is useless. Added a deliberately clean control customer to the sample data — the register must score them 0/Low, proving the system doesn't just over-flag.</a:t>
+              <a:t>A model that flags everyone is useless at scale. Tested against 67 customers with 56 genuinely clean — the register correctly leaves them at 0/Low, proving the system doesn't just over-flag.</a:t>
             </a:r>
           </a:p>
         </p:txBody>
@@ -7995,8 +7995,8 @@
         </p:blipFill>
         <p:spPr>
           <a:xfrm>
-            <a:off x="1229868" y="1280160"/>
-            <a:ext cx="4901184" cy="3063240"/>
+            <a:off x="1452649" y="1280160"/>
+            <a:ext cx="4455621" cy="3063240"/>
           </a:xfrm>
           <a:prstGeom prst="rect">
             <a:avLst/>
@@ -8362,7 +8362,7 @@
                 </a:solidFill>
                 <a:latin typeface="Segoe UI"/>
               </a:rPr>
-              <a:t>5 planted scenarios incl. a clean control case; 7/7 automated tests passing; graceful no-API-key fallback mode</a:t>
+              <a:t>67 customers, 1,971 transactions — 12 distinct risk typologies incl. a clean-majority control group; 7/7 automated tests passing; graceful no-API-key fallback mode</a:t>
             </a:r>
           </a:p>
         </p:txBody>

--- a/docs/Financial_Risk_Signal_Aggregator_Deck.pptx
+++ b/docs/Financial_Risk_Signal_Aggregator_Deck.pptx
@@ -6771,7 +6771,7 @@
                 </a:solidFill>
                 <a:latin typeface="Segoe UI"/>
               </a:rPr>
-              <a:t>Model resilience —  </a:t>
+              <a:t>Multi-provider by design —  </a:t>
             </a:r>
             <a:r>
               <a:rPr sz="1250">
@@ -6780,7 +6780,7 @@
                 </a:solidFill>
                 <a:latin typeface="Segoe UI"/>
               </a:rPr>
-              <a:t>free-tier pinned Gemini versions were retired mid-build; switched to rolling '-latest' aliases with an automatic secondary-model retry.</a:t>
+              <a:t>Gemini is default (fully verified end-to-end); the same interface also supports any OpenAI-compatible API — NVIDIA NIM, OpenAI, Groq — via a sidebar toggle, not hard-wired.</a:t>
             </a:r>
           </a:p>
         </p:txBody>
@@ -7995,8 +7995,8 @@
         </p:blipFill>
         <p:spPr>
           <a:xfrm>
-            <a:off x="1452649" y="1280160"/>
-            <a:ext cx="4455621" cy="3063240"/>
+            <a:off x="1229868" y="1280160"/>
+            <a:ext cx="4901184" cy="3063240"/>
           </a:xfrm>
           <a:prstGeom prst="rect">
             <a:avLst/>
@@ -8334,7 +8334,7 @@
                 </a:solidFill>
                 <a:latin typeface="Segoe UI"/>
               </a:rPr>
-              <a:t>Working end-to-end prototype: ingestion → 11-rule engine → 0-100 explainable score → Gemini rationale → Streamlit dashboard</a:t>
+              <a:t>Working end-to-end prototype: ingestion → 11-rule engine → 0-100 explainable score → AI rationale + score-breakdown waterfall → Streamlit dashboard with a floating multi-turn chat</a:t>
             </a:r>
           </a:p>
           <a:p>
@@ -8362,7 +8362,7 @@
                 </a:solidFill>
                 <a:latin typeface="Segoe UI"/>
               </a:rPr>
-              <a:t>67 customers, 1,971 transactions — 12 distinct risk typologies incl. a clean-majority control group; 7/7 automated tests passing; graceful no-API-key fallback mode</a:t>
+              <a:t>67 customers, 1,971 transactions — 12 distinct risk typologies incl. a clean-majority control group; 7/7 automated tests passing; multi-LLM-provider support; graceful no-API-key fallback mode</a:t>
             </a:r>
           </a:p>
         </p:txBody>

--- a/docs/Financial_Risk_Signal_Aggregator_Deck.pptx
+++ b/docs/Financial_Risk_Signal_Aggregator_Deck.pptx
@@ -6002,7 +6002,7 @@
                 </a:solidFill>
                 <a:latin typeface="Segoe UI"/>
               </a:rPr>
-              <a:t>weak signals from 3 different sources aggregate per customer_id into one strong, prioritised case.</a:t>
+              <a:t>weak signals from 3 different sources aggregate per customer_id into one strong case — and a counterparty network graph links separate flagged customers who share an intermediary, a cross-customer view per-customer scoring can't see.</a:t>
             </a:r>
           </a:p>
         </p:txBody>
@@ -6376,7 +6376,7 @@
       </p:sp>
       <p:pic>
         <p:nvPicPr>
-          <p:cNvPr id="7" name="Picture 6" descr="03_drilldown.png"/>
+          <p:cNvPr id="7" name="Picture 6" descr="08_network.png"/>
           <p:cNvPicPr>
             <a:picLocks noChangeAspect="1"/>
           </p:cNvPicPr>
@@ -6437,7 +6437,7 @@
                 </a:solidFill>
                 <a:latin typeface="Segoe UI"/>
               </a:rPr>
-              <a:t>Live screenshot — entity drill-down with real Gemini rationale</a:t>
+              <a:t>Live screenshot — counterparty network: two independently-flagged customers linked through one shell company</a:t>
             </a:r>
           </a:p>
         </p:txBody>
@@ -6522,7 +6522,7 @@
                 </a:solidFill>
                 <a:latin typeface="Consolas"/>
               </a:rPr>
-              <a:t># config.py — every weight is a named, auditable constant</a:t>
+              <a:t># src/network.py — a counterparty only carries signal if 2+ customers share it</a:t>
             </a:r>
           </a:p>
           <a:p>
@@ -6538,7 +6538,7 @@
                 </a:solidFill>
                 <a:latin typeface="Consolas"/>
               </a:rPr>
-              <a:t>WEIGHTS = {"STRUCTURING": 30, "HIGH_RISK_JURISDICTION": 25,</a:t>
+              <a:t>shared = {cp for cp, custs in counterparty_customers.items()</a:t>
             </a:r>
           </a:p>
           <a:p>
@@ -6554,7 +6554,7 @@
                 </a:solidFill>
                 <a:latin typeface="Consolas"/>
               </a:rPr>
-              <a:t>           "PASS_THROUGH": 25, "VELOCITY_SPIKE": 20, "ADVERSE_MEDIA": 20, ...}</a:t>
+              <a:t>          if len(custs) &gt;= 2}</a:t>
             </a:r>
           </a:p>
           <a:p>
@@ -6570,7 +6570,7 @@
                 </a:solidFill>
                 <a:latin typeface="Consolas"/>
               </a:rPr>
-              <a:t>def score_to_tier(score):  # 0-24 Low · 25-49 Med · 50-74 High · 75-100 Critical</a:t>
+              <a:t># per-customer scoring alone can never see this cross-customer link</a:t>
             </a:r>
           </a:p>
         </p:txBody>
@@ -6697,7 +6697,7 @@
                 </a:solidFill>
                 <a:latin typeface="Segoe UI"/>
               </a:rPr>
-              <a:t>Gemini does 2 jobs only —  </a:t>
+              <a:t>Counterparty network graph —  </a:t>
             </a:r>
             <a:r>
               <a:rPr sz="1250">
@@ -6706,7 +6706,7 @@
                 </a:solidFill>
                 <a:latin typeface="Segoe UI"/>
               </a:rPr>
-              <a:t>(a) parse free-text alerts into structured {entity, severity, summary} hits, (b) write the rationale + recommended action. It never sets the score.</a:t>
+              <a:t>wire counterparties used by 2+ customers become links between them, revealing shared intermediaries per-customer scoring alone cannot see.</a:t>
             </a:r>
           </a:p>
           <a:p>
@@ -6734,7 +6734,7 @@
                 </a:solidFill>
                 <a:latin typeface="Segoe UI"/>
               </a:rPr>
-              <a:t>Guardrailed prompts —  </a:t>
+              <a:t>Gemini vs NVIDIA, verified live —  </a:t>
             </a:r>
             <a:r>
               <a:rPr sz="1250">
@@ -6743,7 +6743,7 @@
                 </a:solidFill>
                 <a:latin typeface="Segoe UI"/>
               </a:rPr>
-              <a:t>every prompt instructs "use only the supplied evidence"; JSON output is validated with pydantic and retried once before falling back.</a:t>
+              <a:t>the same alert text and transactions run through both providers side by side; NVIDIA caught an alert Gemini missed, producing a real score/tier delta.</a:t>
             </a:r>
           </a:p>
           <a:p>
@@ -6771,7 +6771,7 @@
                 </a:solidFill>
                 <a:latin typeface="Segoe UI"/>
               </a:rPr>
-              <a:t>Multi-provider by design —  </a:t>
+              <a:t>Guardrailed prompts —  </a:t>
             </a:r>
             <a:r>
               <a:rPr sz="1250">
@@ -6780,7 +6780,7 @@
                 </a:solidFill>
                 <a:latin typeface="Segoe UI"/>
               </a:rPr>
-              <a:t>Gemini is default (fully verified end-to-end); the same interface also supports any OpenAI-compatible API — NVIDIA NIM, OpenAI, Groq — via a sidebar toggle, not hard-wired.</a:t>
+              <a:t>every prompt instructs "use only the supplied evidence"; JSON output is validated with pydantic and retried once before falling back.</a:t>
             </a:r>
           </a:p>
         </p:txBody>
@@ -6946,7 +6946,7 @@
                 </a:solidFill>
                 <a:latin typeface="Segoe UI"/>
               </a:rPr>
-              <a:t>Full pipeline run against the live Gemini API, screenshots captured from the running app — not mockups</a:t>
+              <a:t>Both LLM providers and the network graph verified against the live running app — screenshots captured from the app, not mockups</a:t>
             </a:r>
           </a:p>
         </p:txBody>
@@ -7665,7 +7665,7 @@
                 </a:solidFill>
                 <a:latin typeface="Segoe UI"/>
               </a:rPr>
-              <a:t>Free-tier model churn</a:t>
+              <a:t>Real-environment testing over assumptions</a:t>
             </a:r>
           </a:p>
         </p:txBody>
@@ -7704,7 +7704,7 @@
                 </a:solidFill>
                 <a:latin typeface="Segoe UI"/>
               </a:rPr>
-              <a:t>Pinned Gemini model versions (2.0-flash, 2.5-flash) were already retired for new API keys mid-build. Learning: depend on rolling '-latest' aliases plus a fallback model, not a pinned version string.</a:t>
+              <a:t>A standalone script test said the NVIDIA-vs-Gemini comparison worked. Driving the real browser session showed it silently compared Gemini to itself — a Streamlit widget/session-state conflict the script couldn't reproduce. Fixed; lesson: verify inside the running app, not just code.</a:t>
             </a:r>
           </a:p>
         </p:txBody>
@@ -8297,7 +8297,7 @@
         <p:spPr>
           <a:xfrm>
             <a:off x="7086600" y="1691640"/>
-            <a:ext cx="4572000" cy="1554480"/>
+            <a:ext cx="4572000" cy="1737360"/>
           </a:xfrm>
           <a:prstGeom prst="rect">
             <a:avLst/>
@@ -8315,11 +8315,11 @@
                 <a:spcPct val="112000"/>
               </a:lnSpc>
               <a:spcAft>
-                <a:spcPts val="1000"/>
+                <a:spcPts val="700"/>
               </a:spcAft>
             </a:pPr>
             <a:r>
-              <a:rPr sz="1250" b="1">
+              <a:rPr sz="1200" b="1">
                 <a:solidFill>
                   <a:srgbClr val="2563EB"/>
                 </a:solidFill>
@@ -8328,13 +8328,13 @@
               <a:t>▸  </a:t>
             </a:r>
             <a:r>
-              <a:rPr sz="1250">
+              <a:rPr sz="1200">
                 <a:solidFill>
                   <a:srgbClr val="334155"/>
                 </a:solidFill>
                 <a:latin typeface="Segoe UI"/>
               </a:rPr>
-              <a:t>Working end-to-end prototype: ingestion → 11-rule engine → 0-100 explainable score → AI rationale + score-breakdown waterfall → Streamlit dashboard with a floating multi-turn chat</a:t>
+              <a:t>Ingestion → 11-rule engine → 0-100 explainable score → AI rationale + waterfall → dashboard with counterparty network graph + floating chat</a:t>
             </a:r>
           </a:p>
           <a:p>
@@ -8343,11 +8343,11 @@
                 <a:spcPct val="112000"/>
               </a:lnSpc>
               <a:spcAft>
-                <a:spcPts val="1000"/>
+                <a:spcPts val="700"/>
               </a:spcAft>
             </a:pPr>
             <a:r>
-              <a:rPr sz="1250" b="1">
+              <a:rPr sz="1200" b="1">
                 <a:solidFill>
                   <a:srgbClr val="2563EB"/>
                 </a:solidFill>
@@ -8356,13 +8356,41 @@
               <a:t>▸  </a:t>
             </a:r>
             <a:r>
-              <a:rPr sz="1250">
+              <a:rPr sz="1200">
                 <a:solidFill>
                   <a:srgbClr val="334155"/>
                 </a:solidFill>
                 <a:latin typeface="Segoe UI"/>
               </a:rPr>
-              <a:t>67 customers, 1,971 transactions — 12 distinct risk typologies incl. a clean-majority control group; 7/7 automated tests passing; multi-LLM-provider support; graceful no-API-key fallback mode</a:t>
+              <a:t>67 customers, 1,971 transactions, 12 risk typologies; 7/7 tests passing</a:t>
+            </a:r>
+          </a:p>
+          <a:p>
+            <a:pPr algn="l">
+              <a:lnSpc>
+                <a:spcPct val="112000"/>
+              </a:lnSpc>
+              <a:spcAft>
+                <a:spcPts val="700"/>
+              </a:spcAft>
+            </a:pPr>
+            <a:r>
+              <a:rPr sz="1200" b="1">
+                <a:solidFill>
+                  <a:srgbClr val="2563EB"/>
+                </a:solidFill>
+                <a:latin typeface="Segoe UI"/>
+              </a:rPr>
+              <a:t>▸  </a:t>
+            </a:r>
+            <a:r>
+              <a:rPr sz="1200">
+                <a:solidFill>
+                  <a:srgbClr val="334155"/>
+                </a:solidFill>
+                <a:latin typeface="Segoe UI"/>
+              </a:rPr>
+              <a:t>Gemini + NVIDIA, both verified live via a real side-by-side comparison view — not just architecturally supported</a:t>
             </a:r>
           </a:p>
         </p:txBody>
@@ -8375,7 +8403,7 @@
         </p:nvSpPr>
         <p:spPr>
           <a:xfrm>
-            <a:off x="7086600" y="3429000"/>
+            <a:off x="7086600" y="3566160"/>
             <a:ext cx="4572000" cy="365760"/>
           </a:xfrm>
           <a:prstGeom prst="rect">
@@ -8414,7 +8442,7 @@
         </p:nvSpPr>
         <p:spPr>
           <a:xfrm>
-            <a:off x="7086600" y="3840480"/>
+            <a:off x="7086600" y="3977639"/>
             <a:ext cx="4572000" cy="2651760"/>
           </a:xfrm>
           <a:prstGeom prst="rect">
@@ -8462,43 +8490,6 @@
                 <a:latin typeface="Segoe UI"/>
               </a:rPr>
               <a:t>live OFAC / UN / EU list APIs in place of the illustrative watchlist.</a:t>
-            </a:r>
-          </a:p>
-          <a:p>
-            <a:pPr algn="l">
-              <a:lnSpc>
-                <a:spcPct val="112000"/>
-              </a:lnSpc>
-              <a:spcAft>
-                <a:spcPts val="800"/>
-              </a:spcAft>
-            </a:pPr>
-            <a:r>
-              <a:rPr sz="1200" b="1">
-                <a:solidFill>
-                  <a:srgbClr val="2563EB"/>
-                </a:solidFill>
-                <a:latin typeface="Segoe UI"/>
-              </a:rPr>
-              <a:t>▸  </a:t>
-            </a:r>
-            <a:r>
-              <a:rPr sz="1200" b="1">
-                <a:solidFill>
-                  <a:srgbClr val="334155"/>
-                </a:solidFill>
-                <a:latin typeface="Segoe UI"/>
-              </a:rPr>
-              <a:t>Network analysis:  </a:t>
-            </a:r>
-            <a:r>
-              <a:rPr sz="1200">
-                <a:solidFill>
-                  <a:srgbClr val="334155"/>
-                </a:solidFill>
-                <a:latin typeface="Segoe UI"/>
-              </a:rPr>
-              <a:t>graph-based correlation across shared counterparties, not just per-customer.</a:t>
             </a:r>
           </a:p>
           <a:p>
